--- a/docs/schematic.pptx
+++ b/docs/schematic.pptx
@@ -104,6 +104,11 @@
       </a:defRPr>
     </a:lvl9pPr>
   </p:defaultTextStyle>
+  <p:extLst>
+    <p:ext uri="{EFAFB233-063F-42B5-8137-9DF3F51BA10A}">
+      <p15:sldGuideLst xmlns:p15="http://schemas.microsoft.com/office/powerpoint/2012/main"/>
+    </p:ext>
+  </p:extLst>
 </p:presentation>
 </file>
 
@@ -256,7 +261,7 @@
           <a:p>
             <a:fld id="{6D6E43F6-95B6-4E95-86F0-1F9445DE4541}" type="datetimeFigureOut">
               <a:rPr lang="de-DE" smtClean="0"/>
-              <a:t>13.08.2026</a:t>
+              <a:t>26.08.2026</a:t>
             </a:fld>
             <a:endParaRPr lang="de-DE"/>
           </a:p>
@@ -456,7 +461,7 @@
           <a:p>
             <a:fld id="{6D6E43F6-95B6-4E95-86F0-1F9445DE4541}" type="datetimeFigureOut">
               <a:rPr lang="de-DE" smtClean="0"/>
-              <a:t>13.08.2026</a:t>
+              <a:t>26.08.2026</a:t>
             </a:fld>
             <a:endParaRPr lang="de-DE"/>
           </a:p>
@@ -666,7 +671,7 @@
           <a:p>
             <a:fld id="{6D6E43F6-95B6-4E95-86F0-1F9445DE4541}" type="datetimeFigureOut">
               <a:rPr lang="de-DE" smtClean="0"/>
-              <a:t>13.08.2026</a:t>
+              <a:t>26.08.2026</a:t>
             </a:fld>
             <a:endParaRPr lang="de-DE"/>
           </a:p>
@@ -866,7 +871,7 @@
           <a:p>
             <a:fld id="{6D6E43F6-95B6-4E95-86F0-1F9445DE4541}" type="datetimeFigureOut">
               <a:rPr lang="de-DE" smtClean="0"/>
-              <a:t>13.08.2026</a:t>
+              <a:t>26.08.2026</a:t>
             </a:fld>
             <a:endParaRPr lang="de-DE"/>
           </a:p>
@@ -1142,7 +1147,7 @@
           <a:p>
             <a:fld id="{6D6E43F6-95B6-4E95-86F0-1F9445DE4541}" type="datetimeFigureOut">
               <a:rPr lang="de-DE" smtClean="0"/>
-              <a:t>13.08.2026</a:t>
+              <a:t>26.08.2026</a:t>
             </a:fld>
             <a:endParaRPr lang="de-DE"/>
           </a:p>
@@ -1410,7 +1415,7 @@
           <a:p>
             <a:fld id="{6D6E43F6-95B6-4E95-86F0-1F9445DE4541}" type="datetimeFigureOut">
               <a:rPr lang="de-DE" smtClean="0"/>
-              <a:t>13.08.2026</a:t>
+              <a:t>26.08.2026</a:t>
             </a:fld>
             <a:endParaRPr lang="de-DE"/>
           </a:p>
@@ -1825,7 +1830,7 @@
           <a:p>
             <a:fld id="{6D6E43F6-95B6-4E95-86F0-1F9445DE4541}" type="datetimeFigureOut">
               <a:rPr lang="de-DE" smtClean="0"/>
-              <a:t>13.08.2026</a:t>
+              <a:t>26.08.2026</a:t>
             </a:fld>
             <a:endParaRPr lang="de-DE"/>
           </a:p>
@@ -1967,7 +1972,7 @@
           <a:p>
             <a:fld id="{6D6E43F6-95B6-4E95-86F0-1F9445DE4541}" type="datetimeFigureOut">
               <a:rPr lang="de-DE" smtClean="0"/>
-              <a:t>13.08.2026</a:t>
+              <a:t>26.08.2026</a:t>
             </a:fld>
             <a:endParaRPr lang="de-DE"/>
           </a:p>
@@ -2080,7 +2085,7 @@
           <a:p>
             <a:fld id="{6D6E43F6-95B6-4E95-86F0-1F9445DE4541}" type="datetimeFigureOut">
               <a:rPr lang="de-DE" smtClean="0"/>
-              <a:t>13.08.2026</a:t>
+              <a:t>26.08.2026</a:t>
             </a:fld>
             <a:endParaRPr lang="de-DE"/>
           </a:p>
@@ -2393,7 +2398,7 @@
           <a:p>
             <a:fld id="{6D6E43F6-95B6-4E95-86F0-1F9445DE4541}" type="datetimeFigureOut">
               <a:rPr lang="de-DE" smtClean="0"/>
-              <a:t>13.08.2026</a:t>
+              <a:t>26.08.2026</a:t>
             </a:fld>
             <a:endParaRPr lang="de-DE"/>
           </a:p>
@@ -2682,7 +2687,7 @@
           <a:p>
             <a:fld id="{6D6E43F6-95B6-4E95-86F0-1F9445DE4541}" type="datetimeFigureOut">
               <a:rPr lang="de-DE" smtClean="0"/>
-              <a:t>13.08.2026</a:t>
+              <a:t>26.08.2026</a:t>
             </a:fld>
             <a:endParaRPr lang="de-DE"/>
           </a:p>
@@ -2925,7 +2930,7 @@
           <a:p>
             <a:fld id="{6D6E43F6-95B6-4E95-86F0-1F9445DE4541}" type="datetimeFigureOut">
               <a:rPr lang="de-DE" smtClean="0"/>
-              <a:t>13.08.2026</a:t>
+              <a:t>26.08.2026</a:t>
             </a:fld>
             <a:endParaRPr lang="de-DE"/>
           </a:p>
@@ -3792,8 +3797,8 @@
           <a:p>
             <a:pPr algn="ctr"/>
             <a:r>
-              <a:rPr lang="en-US" sz="1400"/>
-              <a:t>Synthetic letters</a:t>
+              <a:rPr lang="en-US" sz="1400" dirty="0"/>
+              <a:t>Synthetic letter with personal data</a:t>
             </a:r>
             <a:endParaRPr lang="de-DE" sz="1400" dirty="0"/>
           </a:p>
@@ -3851,14 +3856,14 @@
             <a:pPr algn="ctr"/>
             <a:r>
               <a:rPr lang="en-US" sz="1400" dirty="0"/>
-              <a:t>Real</a:t>
+              <a:t>Personal</a:t>
             </a:r>
           </a:p>
           <a:p>
             <a:pPr algn="ctr"/>
             <a:r>
               <a:rPr lang="en-US" sz="1400" dirty="0"/>
-              <a:t>Bullet points</a:t>
+              <a:t>bullet points</a:t>
             </a:r>
             <a:endParaRPr lang="de-DE" sz="1400" dirty="0"/>
           </a:p>
@@ -4478,8 +4483,8 @@
         </p:nvSpPr>
         <p:spPr>
           <a:xfrm>
-            <a:off x="4416980" y="5988876"/>
-            <a:ext cx="2357645" cy="307777"/>
+            <a:off x="4416981" y="5988876"/>
+            <a:ext cx="2067322" cy="307777"/>
           </a:xfrm>
           <a:prstGeom prst="rect">
             <a:avLst/>
@@ -4536,8 +4541,8 @@
         </p:nvSpPr>
         <p:spPr>
           <a:xfrm>
-            <a:off x="4416533" y="6286283"/>
-            <a:ext cx="2357645" cy="307777"/>
+            <a:off x="4416534" y="6286283"/>
+            <a:ext cx="2067322" cy="307777"/>
           </a:xfrm>
           <a:prstGeom prst="rect">
             <a:avLst/>
